--- a/generated/Tier 1 Broker Scorecards/Swan Insurance Sales, LLC_Broker_Scorecard.pptx
+++ b/generated/Tier 1 Broker Scorecards/Swan Insurance Sales, LLC_Broker_Scorecard.pptx
@@ -3394,7 +3394,7 @@
                         <a:rPr sz="900">
                           <a:latin typeface="Segoe UI"/>
                         </a:rPr>
-                        <a:t>Tier 1  |  24.14% / 15.00%</a:t>
+                        <a:t>Tier 1  |  23.33% / 15.00%</a:t>
                       </a:r>
                     </a:p>
                   </a:txBody>
@@ -3766,7 +3766,7 @@
                         <a:rPr sz="900">
                           <a:latin typeface="Segoe UI"/>
                         </a:rPr>
-                        <a:t>Non-Fleet Subs: 17  |  Binds: 4</a:t>
+                        <a:t>Non-Fleet Subs: 18  |  Binds: 4</a:t>
                       </a:r>
                     </a:p>
                   </a:txBody>
@@ -4428,7 +4428,7 @@
                           </a:solidFill>
                           <a:latin typeface="Segoe UI"/>
                         </a:rPr>
-                        <a:t>6</a:t>
+                        <a:t>7</a:t>
                       </a:r>
                     </a:p>
                   </a:txBody>
@@ -4707,7 +4707,7 @@
                           </a:solidFill>
                           <a:latin typeface="Segoe UI"/>
                         </a:rPr>
-                        <a:t>33.3%</a:t>
+                        <a:t>28.6%</a:t>
                       </a:r>
                     </a:p>
                   </a:txBody>

--- a/generated/Tier 1 Broker Scorecards/Swan Insurance Sales, LLC_Broker_Scorecard.pptx
+++ b/generated/Tier 1 Broker Scorecards/Swan Insurance Sales, LLC_Broker_Scorecard.pptx
@@ -3394,7 +3394,7 @@
                         <a:rPr sz="900">
                           <a:latin typeface="Segoe UI"/>
                         </a:rPr>
-                        <a:t>Tier 1  |  23.33% / 15.00%</a:t>
+                        <a:t>Tier 1  |  26.67% / 15.00%</a:t>
                       </a:r>
                     </a:p>
                   </a:txBody>
@@ -3653,7 +3653,7 @@
                         <a:rPr sz="900">
                           <a:latin typeface="Segoe UI"/>
                         </a:rPr>
-                        <a:t>Fleet Subs: 12  |  Binds: 3</a:t>
+                        <a:t>Fleet Subs: 12  |  Binds: 4</a:t>
                       </a:r>
                     </a:p>
                   </a:txBody>
@@ -3690,7 +3690,7 @@
                         <a:rPr sz="900">
                           <a:latin typeface="Segoe UI"/>
                         </a:rPr>
-                        <a:t>Fleet Bound Premium: $142,783.36</a:t>
+                        <a:t>Fleet Bound Premium: $159,995.62</a:t>
                       </a:r>
                     </a:p>
                   </a:txBody>
@@ -3727,7 +3727,7 @@
                         <a:rPr sz="900">
                           <a:latin typeface="Segoe UI"/>
                         </a:rPr>
-                        <a:t>Fleet Book %: 73.5%</a:t>
+                        <a:t>Fleet Book %: 82.4%</a:t>
                       </a:r>
                     </a:p>
                   </a:txBody>
@@ -3803,7 +3803,7 @@
                         <a:rPr sz="900">
                           <a:latin typeface="Segoe UI"/>
                         </a:rPr>
-                        <a:t>Non-Fleet Bound Premium: $51,403.60</a:t>
+                        <a:t>Non-Fleet Bound Premium: $34,191.34</a:t>
                       </a:r>
                     </a:p>
                   </a:txBody>
@@ -3840,7 +3840,7 @@
                         <a:rPr sz="900">
                           <a:latin typeface="Segoe UI"/>
                         </a:rPr>
-                        <a:t>Non-Fleet Book %: 26.5%</a:t>
+                        <a:t>Non-Fleet Book %: 17.6%</a:t>
                       </a:r>
                     </a:p>
                   </a:txBody>
@@ -4707,7 +4707,7 @@
                           </a:solidFill>
                           <a:latin typeface="Segoe UI"/>
                         </a:rPr>
-                        <a:t>28.6%</a:t>
+                        <a:t>42.9%</a:t>
                       </a:r>
                     </a:p>
                   </a:txBody>
@@ -4983,7 +4983,7 @@
                           </a:solidFill>
                           <a:latin typeface="Segoe UI"/>
                         </a:rPr>
-                        <a:t>2</a:t>
+                        <a:t>3</a:t>
                       </a:r>
                     </a:p>
                   </a:txBody>

--- a/generated/Tier 1 Broker Scorecards/Swan Insurance Sales, LLC_Broker_Scorecard.pptx
+++ b/generated/Tier 1 Broker Scorecards/Swan Insurance Sales, LLC_Broker_Scorecard.pptx
@@ -3394,7 +3394,7 @@
                         <a:rPr sz="900">
                           <a:latin typeface="Segoe UI"/>
                         </a:rPr>
-                        <a:t>Tier 1  |  26.67% / 15.00%</a:t>
+                        <a:t>Tier 1  |  25.81% / 15.00%</a:t>
                       </a:r>
                     </a:p>
                   </a:txBody>
@@ -3690,7 +3690,7 @@
                         <a:rPr sz="900">
                           <a:latin typeface="Segoe UI"/>
                         </a:rPr>
-                        <a:t>Fleet Bound Premium: $159,995.62</a:t>
+                        <a:t>Fleet Bound Premium: $151,434.94</a:t>
                       </a:r>
                     </a:p>
                   </a:txBody>
@@ -3727,7 +3727,7 @@
                         <a:rPr sz="900">
                           <a:latin typeface="Segoe UI"/>
                         </a:rPr>
-                        <a:t>Fleet Book %: 82.4%</a:t>
+                        <a:t>Fleet Book %: 78.0%</a:t>
                       </a:r>
                     </a:p>
                   </a:txBody>
@@ -3766,7 +3766,7 @@
                         <a:rPr sz="900">
                           <a:latin typeface="Segoe UI"/>
                         </a:rPr>
-                        <a:t>Non-Fleet Subs: 18  |  Binds: 4</a:t>
+                        <a:t>Non-Fleet Subs: 19  |  Binds: 4</a:t>
                       </a:r>
                     </a:p>
                   </a:txBody>
@@ -3803,7 +3803,7 @@
                         <a:rPr sz="900">
                           <a:latin typeface="Segoe UI"/>
                         </a:rPr>
-                        <a:t>Non-Fleet Bound Premium: $34,191.34</a:t>
+                        <a:t>Non-Fleet Bound Premium: $42,752.02</a:t>
                       </a:r>
                     </a:p>
                   </a:txBody>
@@ -3840,7 +3840,7 @@
                         <a:rPr sz="900">
                           <a:latin typeface="Segoe UI"/>
                         </a:rPr>
-                        <a:t>Non-Fleet Book %: 17.6%</a:t>
+                        <a:t>Non-Fleet Book %: 22.0%</a:t>
                       </a:r>
                     </a:p>
                   </a:txBody>
@@ -4428,7 +4428,7 @@
                           </a:solidFill>
                           <a:latin typeface="Segoe UI"/>
                         </a:rPr>
-                        <a:t>7</a:t>
+                        <a:t>8</a:t>
                       </a:r>
                     </a:p>
                   </a:txBody>
@@ -4707,7 +4707,7 @@
                           </a:solidFill>
                           <a:latin typeface="Segoe UI"/>
                         </a:rPr>
-                        <a:t>42.9%</a:t>
+                        <a:t>37.5%</a:t>
                       </a:r>
                     </a:p>
                   </a:txBody>

--- a/generated/Tier 1 Broker Scorecards/Swan Insurance Sales, LLC_Broker_Scorecard.pptx
+++ b/generated/Tier 1 Broker Scorecards/Swan Insurance Sales, LLC_Broker_Scorecard.pptx
@@ -3394,7 +3394,7 @@
                         <a:rPr sz="900">
                           <a:latin typeface="Segoe UI"/>
                         </a:rPr>
-                        <a:t>Tier 1  |  25.81% / 15.00%</a:t>
+                        <a:t>Tier 1  |  20.00% / 15.00%</a:t>
                       </a:r>
                     </a:p>
                   </a:txBody>
@@ -3653,7 +3653,7 @@
                         <a:rPr sz="900">
                           <a:latin typeface="Segoe UI"/>
                         </a:rPr>
-                        <a:t>Fleet Subs: 12  |  Binds: 4</a:t>
+                        <a:t>Fleet Subs: 13  |  Binds: 4</a:t>
                       </a:r>
                     </a:p>
                   </a:txBody>
@@ -3690,7 +3690,7 @@
                         <a:rPr sz="900">
                           <a:latin typeface="Segoe UI"/>
                         </a:rPr>
-                        <a:t>Fleet Bound Premium: $151,434.94</a:t>
+                        <a:t>Fleet Bound Premium: $159,222.45</a:t>
                       </a:r>
                     </a:p>
                   </a:txBody>
@@ -3727,7 +3727,7 @@
                         <a:rPr sz="900">
                           <a:latin typeface="Segoe UI"/>
                         </a:rPr>
-                        <a:t>Fleet Book %: 78.0%</a:t>
+                        <a:t>Fleet Book %: 82.0%</a:t>
                       </a:r>
                     </a:p>
                   </a:txBody>
@@ -3766,7 +3766,7 @@
                         <a:rPr sz="900">
                           <a:latin typeface="Segoe UI"/>
                         </a:rPr>
-                        <a:t>Non-Fleet Subs: 19  |  Binds: 4</a:t>
+                        <a:t>Non-Fleet Subs: 22  |  Binds: 3</a:t>
                       </a:r>
                     </a:p>
                   </a:txBody>
@@ -3803,7 +3803,7 @@
                         <a:rPr sz="900">
                           <a:latin typeface="Segoe UI"/>
                         </a:rPr>
-                        <a:t>Non-Fleet Bound Premium: $42,752.02</a:t>
+                        <a:t>Non-Fleet Bound Premium: $34,964.51</a:t>
                       </a:r>
                     </a:p>
                   </a:txBody>
@@ -3840,7 +3840,7 @@
                         <a:rPr sz="900">
                           <a:latin typeface="Segoe UI"/>
                         </a:rPr>
-                        <a:t>Non-Fleet Book %: 22.0%</a:t>
+                        <a:t>Non-Fleet Book %: 18.0%</a:t>
                       </a:r>
                     </a:p>
                   </a:txBody>
@@ -4428,7 +4428,7 @@
                           </a:solidFill>
                           <a:latin typeface="Segoe UI"/>
                         </a:rPr>
-                        <a:t>8</a:t>
+                        <a:t>12</a:t>
                       </a:r>
                     </a:p>
                   </a:txBody>
@@ -4707,7 +4707,7 @@
                           </a:solidFill>
                           <a:latin typeface="Segoe UI"/>
                         </a:rPr>
-                        <a:t>37.5%</a:t>
+                        <a:t>16.7%</a:t>
                       </a:r>
                     </a:p>
                   </a:txBody>
@@ -4983,7 +4983,7 @@
                           </a:solidFill>
                           <a:latin typeface="Segoe UI"/>
                         </a:rPr>
-                        <a:t>3</a:t>
+                        <a:t>2</a:t>
                       </a:r>
                     </a:p>
                   </a:txBody>

--- a/generated/Tier 1 Broker Scorecards/Swan Insurance Sales, LLC_Broker_Scorecard.pptx
+++ b/generated/Tier 1 Broker Scorecards/Swan Insurance Sales, LLC_Broker_Scorecard.pptx
@@ -3394,7 +3394,7 @@
                         <a:rPr sz="900">
                           <a:latin typeface="Segoe UI"/>
                         </a:rPr>
-                        <a:t>Tier 1  |  20.00% / 15.00%</a:t>
+                        <a:t>Tier 1  |  19.44% / 15.00%</a:t>
                       </a:r>
                     </a:p>
                   </a:txBody>
@@ -3653,7 +3653,7 @@
                         <a:rPr sz="900">
                           <a:latin typeface="Segoe UI"/>
                         </a:rPr>
-                        <a:t>Fleet Subs: 13  |  Binds: 4</a:t>
+                        <a:t>Fleet Subs: 14  |  Binds: 4</a:t>
                       </a:r>
                     </a:p>
                   </a:txBody>
@@ -3690,7 +3690,7 @@
                         <a:rPr sz="900">
                           <a:latin typeface="Segoe UI"/>
                         </a:rPr>
-                        <a:t>Fleet Bound Premium: $159,222.45</a:t>
+                        <a:t>Fleet Bound Premium: $166,508.77</a:t>
                       </a:r>
                     </a:p>
                   </a:txBody>
@@ -3727,7 +3727,7 @@
                         <a:rPr sz="900">
                           <a:latin typeface="Segoe UI"/>
                         </a:rPr>
-                        <a:t>Fleet Book %: 82.0%</a:t>
+                        <a:t>Fleet Book %: 85.7%</a:t>
                       </a:r>
                     </a:p>
                   </a:txBody>
@@ -3803,7 +3803,7 @@
                         <a:rPr sz="900">
                           <a:latin typeface="Segoe UI"/>
                         </a:rPr>
-                        <a:t>Non-Fleet Bound Premium: $34,964.51</a:t>
+                        <a:t>Non-Fleet Bound Premium: $27,678.19</a:t>
                       </a:r>
                     </a:p>
                   </a:txBody>
@@ -3840,7 +3840,7 @@
                         <a:rPr sz="900">
                           <a:latin typeface="Segoe UI"/>
                         </a:rPr>
-                        <a:t>Non-Fleet Book %: 18.0%</a:t>
+                        <a:t>Non-Fleet Book %: 14.3%</a:t>
                       </a:r>
                     </a:p>
                   </a:txBody>
@@ -4424,11 +4424,11 @@
                       <a:r>
                         <a:rPr sz="800">
                           <a:solidFill>
-                            <a:srgbClr val="DC2626"/>
+                            <a:srgbClr val="059669"/>
                           </a:solidFill>
                           <a:latin typeface="Segoe UI"/>
                         </a:rPr>
-                        <a:t>12</a:t>
+                        <a:t>15</a:t>
                       </a:r>
                     </a:p>
                   </a:txBody>
@@ -4707,7 +4707,7 @@
                           </a:solidFill>
                           <a:latin typeface="Segoe UI"/>
                         </a:rPr>
-                        <a:t>16.7%</a:t>
+                        <a:t>20.0%</a:t>
                       </a:r>
                     </a:p>
                   </a:txBody>
@@ -4983,7 +4983,7 @@
                           </a:solidFill>
                           <a:latin typeface="Segoe UI"/>
                         </a:rPr>
-                        <a:t>2</a:t>
+                        <a:t>3</a:t>
                       </a:r>
                     </a:p>
                   </a:txBody>

--- a/generated/Tier 1 Broker Scorecards/Swan Insurance Sales, LLC_Broker_Scorecard.pptx
+++ b/generated/Tier 1 Broker Scorecards/Swan Insurance Sales, LLC_Broker_Scorecard.pptx
@@ -3357,7 +3357,7 @@
                         <a:rPr sz="800">
                           <a:latin typeface="Segoe UI"/>
                         </a:rPr>
-                        <a:t>$919,465.98 / $901,771.24 / $194,186.96</a:t>
+                        <a:t>$919,465.98 / $850,381.37 / $194,186.96</a:t>
                       </a:r>
                     </a:p>
                   </a:txBody>
